--- a/templates/posts/october/2026-10-09-fri-ig-mentor-gerald-caterina.pptx
+++ b/templates/posts/october/2026-10-09-fri-ig-mentor-gerald-caterina.pptx
@@ -3658,12 +3658,20 @@
         <p:nvPr/>
       </p:nvGrpSpPr>
       <p:grpSpPr/>
-      <p:sp>
-        <p:nvSpPr>
-          <p:cNvPr id="2" name="Rectangle 1"/>
-          <p:cNvSpPr/>
+      <p:pic>
+        <p:nvPicPr>
+          <p:cNvPr id="2" name="Picture 1" descr="2386358576702019774.jpg"/>
+          <p:cNvPicPr>
+            <a:picLocks noChangeAspect="1"/>
+          </p:cNvPicPr>
           <p:nvPr/>
-        </p:nvSpPr>
+        </p:nvPicPr>
+        <p:blipFill>
+          <a:blip r:embed="rId3"/>
+          <a:stretch>
+            <a:fillRect/>
+          </a:stretch>
+        </p:blipFill>
         <p:spPr>
           <a:xfrm>
             <a:off x="0" y="0"/>
@@ -3672,78 +3680,11 @@
           <a:prstGeom prst="rect">
             <a:avLst/>
           </a:prstGeom>
-          <a:solidFill>
-            <a:srgbClr val="C9C4B8"/>
-          </a:solidFill>
-          <a:ln>
-            <a:noFill/>
-          </a:ln>
-          <a:effectLst/>
         </p:spPr>
-        <p:style>
-          <a:lnRef idx="1">
-            <a:schemeClr val="accent1"/>
-          </a:lnRef>
-          <a:fillRef idx="3">
-            <a:schemeClr val="accent1"/>
-          </a:fillRef>
-          <a:effectRef idx="2">
-            <a:schemeClr val="accent1"/>
-          </a:effectRef>
-          <a:fontRef idx="minor">
-            <a:schemeClr val="lt1"/>
-          </a:fontRef>
-        </p:style>
-        <p:txBody>
-          <a:bodyPr rtlCol="0" anchor="ctr"/>
-          <a:lstStyle/>
-          <a:p>
-            <a:pPr algn="ctr"/>
-          </a:p>
-        </p:txBody>
-      </p:sp>
-      <p:sp>
-        <p:nvSpPr>
-          <p:cNvPr id="3" name="TextBox 2"/>
-          <p:cNvSpPr txBox="1"/>
-          <p:nvPr/>
-        </p:nvSpPr>
-        <p:spPr>
-          <a:xfrm>
-            <a:off x="152400" y="0"/>
-            <a:ext cx="4810125" cy="12858750"/>
-          </a:xfrm>
-          <a:prstGeom prst="rect">
-            <a:avLst/>
-          </a:prstGeom>
-          <a:noFill/>
-        </p:spPr>
-        <p:txBody>
-          <a:bodyPr wrap="square" lIns="0" rIns="0" tIns="0" bIns="0" anchor="ctr">
-            <a:spAutoFit/>
-          </a:bodyPr>
-          <a:lstStyle/>
-          <a:p>
-            <a:pPr algn="ctr">
-              <a:lnSpc>
-                <a:spcPct val="120000"/>
-              </a:lnSpc>
-            </a:pPr>
-            <a:r>
-              <a:rPr sz="2000" b="1" i="0">
-                <a:solidFill>
-                  <a:srgbClr val="4A463F"/>
-                </a:solidFill>
-                <a:latin typeface="Source Sans 3"/>
-              </a:rPr>
-              <a:t>PHOTO: Gerald Ramirez, portrait</a:t>
-            </a:r>
-          </a:p>
-        </p:txBody>
-      </p:sp>
-      <p:sp>
-        <p:nvSpPr>
-          <p:cNvPr id="4" name="Rectangle 3"/>
+      </p:pic>
+      <p:sp>
+        <p:nvSpPr>
+          <p:cNvPr id="3" name="Rectangle 2"/>
           <p:cNvSpPr/>
           <p:nvPr/>
         </p:nvSpPr>
@@ -3787,7 +3728,7 @@
       </p:sp>
       <p:sp>
         <p:nvSpPr>
-          <p:cNvPr id="5" name="TextBox 4"/>
+          <p:cNvPr id="4" name="TextBox 3"/>
           <p:cNvSpPr txBox="1"/>
           <p:nvPr/>
         </p:nvSpPr>
@@ -3826,7 +3767,7 @@
       </p:sp>
       <p:sp>
         <p:nvSpPr>
-          <p:cNvPr id="6" name="Rectangle 5"/>
+          <p:cNvPr id="5" name="Rectangle 4"/>
           <p:cNvSpPr/>
           <p:nvPr/>
         </p:nvSpPr>
@@ -3870,7 +3811,7 @@
       </p:sp>
       <p:sp>
         <p:nvSpPr>
-          <p:cNvPr id="7" name="Rounded Rectangle 6"/>
+          <p:cNvPr id="6" name="Rounded Rectangle 5"/>
           <p:cNvSpPr/>
           <p:nvPr/>
         </p:nvSpPr>
@@ -3918,7 +3859,7 @@
       </p:sp>
       <p:sp>
         <p:nvSpPr>
-          <p:cNvPr id="8" name="TextBox 7"/>
+          <p:cNvPr id="7" name="TextBox 6"/>
           <p:cNvSpPr txBox="1"/>
           <p:nvPr/>
         </p:nvSpPr>
@@ -3957,7 +3898,7 @@
       </p:sp>
       <p:sp>
         <p:nvSpPr>
-          <p:cNvPr id="9" name="Rectangle 8"/>
+          <p:cNvPr id="8" name="Rectangle 7"/>
           <p:cNvSpPr/>
           <p:nvPr/>
         </p:nvSpPr>
@@ -4003,7 +3944,7 @@
       </p:sp>
       <p:sp>
         <p:nvSpPr>
-          <p:cNvPr id="10" name="TextBox 9"/>
+          <p:cNvPr id="9" name="TextBox 8"/>
           <p:cNvSpPr txBox="1"/>
           <p:nvPr/>
         </p:nvSpPr>
@@ -4042,7 +3983,7 @@
       </p:sp>
       <p:sp>
         <p:nvSpPr>
-          <p:cNvPr id="11" name="TextBox 10"/>
+          <p:cNvPr id="10" name="TextBox 9"/>
           <p:cNvSpPr txBox="1"/>
           <p:nvPr/>
         </p:nvSpPr>
@@ -4081,7 +4022,7 @@
       </p:sp>
       <p:sp>
         <p:nvSpPr>
-          <p:cNvPr id="12" name="TextBox 11"/>
+          <p:cNvPr id="11" name="TextBox 10"/>
           <p:cNvSpPr txBox="1"/>
           <p:nvPr/>
         </p:nvSpPr>
@@ -4120,7 +4061,7 @@
       </p:sp>
       <p:sp>
         <p:nvSpPr>
-          <p:cNvPr id="13" name="TextBox 12"/>
+          <p:cNvPr id="12" name="TextBox 11"/>
           <p:cNvSpPr txBox="1"/>
           <p:nvPr/>
         </p:nvSpPr>
@@ -4159,7 +4100,7 @@
       </p:sp>
       <p:sp>
         <p:nvSpPr>
-          <p:cNvPr id="14" name="TextBox 13"/>
+          <p:cNvPr id="13" name="TextBox 12"/>
           <p:cNvSpPr txBox="1"/>
           <p:nvPr/>
         </p:nvSpPr>

--- a/templates/posts/october/2026-10-09-fri-ig-mentor-gerald-caterina.pptx
+++ b/templates/posts/october/2026-10-09-fri-ig-mentor-gerald-caterina.pptx
@@ -574,7 +574,7 @@
           <a:lstStyle/>
           <a:p>
             <a:r>
-              <a:t>2B. </a:t>
+              <a:t>2B. Small image: Gerald teaching (other people in frame: check consent).</a:t>
             </a:r>
           </a:p>
         </p:txBody>
@@ -3660,7 +3660,7 @@
       <p:grpSpPr/>
       <p:pic>
         <p:nvPicPr>
-          <p:cNvPr id="2" name="Picture 1" descr="2386358576702019774.jpg"/>
+          <p:cNvPr id="2" name="Picture 1" descr="7704146277928668948.jpg"/>
           <p:cNvPicPr>
             <a:picLocks noChangeAspect="1"/>
           </p:cNvPicPr>
@@ -4321,9 +4321,35 @@
           </a:p>
         </p:txBody>
       </p:sp>
-      <p:sp>
-        <p:nvSpPr>
-          <p:cNvPr id="6" name="TextBox 5"/>
+      <p:pic>
+        <p:nvPicPr>
+          <p:cNvPr id="6" name="Picture 5" descr="5785756598199802378.jpg"/>
+          <p:cNvPicPr>
+            <a:picLocks noChangeAspect="1"/>
+          </p:cNvPicPr>
+          <p:nvPr/>
+        </p:nvPicPr>
+        <p:blipFill>
+          <a:blip r:embed="rId3"/>
+          <a:stretch>
+            <a:fillRect/>
+          </a:stretch>
+        </p:blipFill>
+        <p:spPr>
+          <a:xfrm>
+            <a:off x="5715000" y="8286750"/>
+            <a:ext cx="3810000" cy="3810000"/>
+          </a:xfrm>
+          <a:prstGeom prst="roundRect">
+            <a:avLst>
+              <a:gd name="adj" fmla="val 6000"/>
+            </a:avLst>
+          </a:prstGeom>
+        </p:spPr>
+      </p:pic>
+      <p:sp>
+        <p:nvSpPr>
+          <p:cNvPr id="7" name="TextBox 6"/>
           <p:cNvSpPr txBox="1"/>
           <p:nvPr/>
         </p:nvSpPr>

--- a/templates/posts/october/2026-10-09-fri-ig-mentor-gerald-caterina.pptx
+++ b/templates/posts/october/2026-10-09-fri-ig-mentor-gerald-caterina.pptx
@@ -3660,7 +3660,7 @@
       <p:grpSpPr/>
       <p:pic>
         <p:nvPicPr>
-          <p:cNvPr id="2" name="Picture 1" descr="7704146277928668948.jpg"/>
+          <p:cNvPr id="2" name="Picture 1" descr="3147067173740494874.jpg"/>
           <p:cNvPicPr>
             <a:picLocks noChangeAspect="1"/>
           </p:cNvPicPr>
@@ -4323,7 +4323,7 @@
       </p:sp>
       <p:pic>
         <p:nvPicPr>
-          <p:cNvPr id="6" name="Picture 5" descr="5785756598199802378.jpg"/>
+          <p:cNvPr id="6" name="Picture 5" descr="8140614964351287429.jpg"/>
           <p:cNvPicPr>
             <a:picLocks noChangeAspect="1"/>
           </p:cNvPicPr>

--- a/templates/posts/october/2026-10-09-fri-ig-mentor-gerald-caterina.pptx
+++ b/templates/posts/october/2026-10-09-fri-ig-mentor-gerald-caterina.pptx
@@ -3660,7 +3660,7 @@
       <p:grpSpPr/>
       <p:pic>
         <p:nvPicPr>
-          <p:cNvPr id="2" name="Picture 1" descr="3147067173740494874.jpg"/>
+          <p:cNvPr id="2" name="Picture 1" descr="8328845266368741925.jpg"/>
           <p:cNvPicPr>
             <a:picLocks noChangeAspect="1"/>
           </p:cNvPicPr>
@@ -3976,7 +3976,7 @@
                 </a:solidFill>
                 <a:latin typeface="Montserrat"/>
               </a:rPr>
-              <a:t>Gerald Ramirez</a:t>
+              <a:t>Gerald Ramírez</a:t>
             </a:r>
           </a:p>
         </p:txBody>
@@ -4323,7 +4323,7 @@
       </p:sp>
       <p:pic>
         <p:nvPicPr>
-          <p:cNvPr id="6" name="Picture 5" descr="8140614964351287429.jpg"/>
+          <p:cNvPr id="6" name="Picture 5" descr="775660757264129496.jpg"/>
           <p:cNvPicPr>
             <a:picLocks noChangeAspect="1"/>
           </p:cNvPicPr>

--- a/templates/posts/october/2026-10-09-fri-ig-mentor-gerald-caterina.pptx
+++ b/templates/posts/october/2026-10-09-fri-ig-mentor-gerald-caterina.pptx
@@ -3660,7 +3660,7 @@
       <p:grpSpPr/>
       <p:pic>
         <p:nvPicPr>
-          <p:cNvPr id="2" name="Picture 1" descr="8328845266368741925.jpg"/>
+          <p:cNvPr id="2" name="Picture 1" descr="6868708901196366873.jpg"/>
           <p:cNvPicPr>
             <a:picLocks noChangeAspect="1"/>
           </p:cNvPicPr>
@@ -4323,7 +4323,7 @@
       </p:sp>
       <p:pic>
         <p:nvPicPr>
-          <p:cNvPr id="6" name="Picture 5" descr="775660757264129496.jpg"/>
+          <p:cNvPr id="6" name="Picture 5" descr="6703582109685098128.jpg"/>
           <p:cNvPicPr>
             <a:picLocks noChangeAspect="1"/>
           </p:cNvPicPr>

--- a/templates/posts/october/2026-10-09-fri-ig-mentor-gerald-caterina.pptx
+++ b/templates/posts/october/2026-10-09-fri-ig-mentor-gerald-caterina.pptx
@@ -3646,7 +3646,7 @@
     <p:bg>
       <p:bgPr>
         <a:solidFill>
-          <a:srgbClr val="22371F"/>
+          <a:srgbClr val="1E3F1D"/>
         </a:solidFill>
         <a:effectLst/>
       </p:bgPr>
@@ -3660,7 +3660,7 @@
       <p:grpSpPr/>
       <p:pic>
         <p:nvPicPr>
-          <p:cNvPr id="2" name="Picture 1" descr="6868708901196366873.jpg"/>
+          <p:cNvPr id="2" name="Picture 1" descr="8256478384591866010.jpg"/>
           <p:cNvPicPr>
             <a:picLocks noChangeAspect="1"/>
           </p:cNvPicPr>
@@ -3780,7 +3780,7 @@
             <a:avLst/>
           </a:prstGeom>
           <a:solidFill>
-            <a:srgbClr val="F4F1EA"/>
+            <a:srgbClr val="F3F1EA"/>
           </a:solidFill>
           <a:ln>
             <a:noFill/>
@@ -3826,7 +3826,7 @@
             </a:avLst>
           </a:prstGeom>
           <a:solidFill>
-            <a:srgbClr val="22371F">
+            <a:srgbClr val="1E3F1D">
               <a:alpha val="90000"/>
             </a:srgbClr>
           </a:solidFill>
@@ -3887,7 +3887,7 @@
             <a:r>
               <a:rPr sz="2200" b="1" i="0" spc="200">
                 <a:solidFill>
-                  <a:srgbClr val="DBE6A7"/>
+                  <a:srgbClr val="B1BCB1"/>
                 </a:solidFill>
                 <a:latin typeface="Montserrat"/>
               </a:rPr>
@@ -3911,7 +3911,7 @@
             <a:avLst/>
           </a:prstGeom>
           <a:solidFill>
-            <a:srgbClr val="22371F">
+            <a:srgbClr val="1E3F1D">
               <a:alpha val="90000"/>
             </a:srgbClr>
           </a:solidFill>
@@ -3972,7 +3972,7 @@
             <a:r>
               <a:rPr sz="4400" b="1" i="0">
                 <a:solidFill>
-                  <a:srgbClr val="F4F1EA"/>
+                  <a:srgbClr val="F3F1EA"/>
                 </a:solidFill>
                 <a:latin typeface="Montserrat"/>
               </a:rPr>
@@ -4011,7 +4011,7 @@
             <a:r>
               <a:rPr sz="2800" b="0" i="0">
                 <a:solidFill>
-                  <a:srgbClr val="DBE6A7"/>
+                  <a:srgbClr val="B1BCB1"/>
                 </a:solidFill>
                 <a:latin typeface="Source Sans 3"/>
               </a:rPr>
@@ -4050,7 +4050,7 @@
             <a:r>
               <a:rPr sz="4000" b="1" i="0">
                 <a:solidFill>
-                  <a:srgbClr val="F4F1EA"/>
+                  <a:srgbClr val="F3F1EA"/>
                 </a:solidFill>
                 <a:latin typeface="Montserrat"/>
               </a:rPr>
@@ -4089,7 +4089,7 @@
             <a:r>
               <a:rPr sz="2800" b="0" i="0">
                 <a:solidFill>
-                  <a:srgbClr val="DBE6A7"/>
+                  <a:srgbClr val="B1BCB1"/>
                 </a:solidFill>
                 <a:latin typeface="Source Sans 3"/>
               </a:rPr>
@@ -4128,7 +4128,7 @@
             <a:r>
               <a:rPr sz="2000" b="0" i="0">
                 <a:solidFill>
-                  <a:srgbClr val="F4F1EA">
+                  <a:srgbClr val="F3F1EA">
                     <a:alpha val="60000"/>
                   </a:srgbClr>
                 </a:solidFill>
@@ -4153,7 +4153,7 @@
     <p:bg>
       <p:bgPr>
         <a:solidFill>
-          <a:srgbClr val="F4F1EA"/>
+          <a:srgbClr val="F3F1EA"/>
         </a:solidFill>
         <a:effectLst/>
       </p:bgPr>
@@ -4195,7 +4195,7 @@
             <a:r>
               <a:rPr sz="4600" b="1" i="0">
                 <a:solidFill>
-                  <a:srgbClr val="22371F"/>
+                  <a:srgbClr val="1E3F1D"/>
                 </a:solidFill>
                 <a:latin typeface="Montserrat"/>
               </a:rPr>
@@ -4323,7 +4323,7 @@
       </p:sp>
       <p:pic>
         <p:nvPicPr>
-          <p:cNvPr id="6" name="Picture 5" descr="6703582109685098128.jpg"/>
+          <p:cNvPr id="6" name="Picture 5" descr="8377794559945997141.jpg"/>
           <p:cNvPicPr>
             <a:picLocks noChangeAspect="1"/>
           </p:cNvPicPr>
@@ -4402,7 +4402,7 @@
     <p:bg>
       <p:bgPr>
         <a:solidFill>
-          <a:srgbClr val="F4F1EA"/>
+          <a:srgbClr val="F3F1EA"/>
         </a:solidFill>
         <a:effectLst/>
       </p:bgPr>
@@ -4444,7 +4444,7 @@
             <a:r>
               <a:rPr sz="4600" b="1" i="0">
                 <a:solidFill>
-                  <a:srgbClr val="22371F"/>
+                  <a:srgbClr val="1E3F1D"/>
                 </a:solidFill>
                 <a:latin typeface="Montserrat"/>
               </a:rPr>

--- a/templates/posts/october/2026-10-09-fri-ig-mentor-gerald-caterina.pptx
+++ b/templates/posts/october/2026-10-09-fri-ig-mentor-gerald-caterina.pptx
@@ -3660,7 +3660,7 @@
       <p:grpSpPr/>
       <p:pic>
         <p:nvPicPr>
-          <p:cNvPr id="2" name="Picture 1" descr="8256478384591866010.jpg"/>
+          <p:cNvPr id="2" name="Picture 1" descr="3568221536683944452.jpg"/>
           <p:cNvPicPr>
             <a:picLocks noChangeAspect="1"/>
           </p:cNvPicPr>
@@ -4323,7 +4323,7 @@
       </p:sp>
       <p:pic>
         <p:nvPicPr>
-          <p:cNvPr id="6" name="Picture 5" descr="8377794559945997141.jpg"/>
+          <p:cNvPr id="6" name="Picture 5" descr="5140361850222912550.jpg"/>
           <p:cNvPicPr>
             <a:picLocks noChangeAspect="1"/>
           </p:cNvPicPr>
